--- a/Schools_ML_Track/camp_2026/slides/DA/DA24.pptx
+++ b/Schools_ML_Track/camp_2026/slides/DA/DA24.pptx
@@ -115,7 +115,7 @@
   <p:extLst>
     <p:ext uri="{521415D9-36F7-43E2-AB2F-B90AF26B5E84}">
       <p14:sectionLst xmlns:p14="http://schemas.microsoft.com/office/powerpoint/2010/main">
-        <p14:section name="Opening" id="{022081a0-01a7-dec9-740d-414708ec1d13}">
+        <p14:section name="Opening" id="{e2687652-bb3d-3b7c-7fa6-ac2ddd8a8669}">
           <p14:sldIdLst>
             <p14:sldId id="256"/>
             <p14:sldId id="257"/>
@@ -125,7 +125,7 @@
             <p14:sldId id="261"/>
           </p14:sldIdLst>
         </p14:section>
-        <p14:section name="Make and close" id="{7fbab416-ff10-a78b-9a90-c0d1b134040c}">
+        <p14:section name="Make and close" id="{7286c956-00fe-a5f6-d1bb-d31a4e07b7d5}">
           <p14:sldIdLst>
             <p14:sldId id="262"/>
             <p14:sldId id="263"/>

--- a/Schools_ML_Track/camp_2026/slides/DA/DA24.pptx
+++ b/Schools_ML_Track/camp_2026/slides/DA/DA24.pptx
@@ -14,9 +14,10 @@
     <p:sldId id="262" r:id="rId8"/>
     <p:sldId id="263" r:id="rId9"/>
     <p:sldId id="264" r:id="rId10"/>
+    <p:sldId id="265" r:id="rId11"/>
   </p:sldIdLst>
   <p:notesMasterIdLst>
-    <p:notesMasterId r:id="rId11"/>
+    <p:notesMasterId r:id="rId12"/>
   </p:notesMasterIdLst>
   <p:sldSz cx="12192000" cy="6858000"/>
   <p:notesSz cx="6858000" cy="12192000"/>
@@ -115,7 +116,7 @@
   <p:extLst>
     <p:ext uri="{521415D9-36F7-43E2-AB2F-B90AF26B5E84}">
       <p14:sectionLst xmlns:p14="http://schemas.microsoft.com/office/powerpoint/2010/main">
-        <p14:section name="Opening" id="{e2687652-bb3d-3b7c-7fa6-ac2ddd8a8669}">
+        <p14:section name="Opening" id="{a5c9da40-c14a-85e8-f698-cc70eb26f8e6}">
           <p14:sldIdLst>
             <p14:sldId id="256"/>
             <p14:sldId id="257"/>
@@ -125,11 +126,12 @@
             <p14:sldId id="261"/>
           </p14:sldIdLst>
         </p14:section>
-        <p14:section name="Make and close" id="{7286c956-00fe-a5f6-d1bb-d31a4e07b7d5}">
+        <p14:section name="Make and close" id="{07b06abf-edec-9f49-dd11-bc77507cfea1}">
           <p14:sldIdLst>
             <p14:sldId id="262"/>
             <p14:sldId id="263"/>
             <p14:sldId id="264"/>
+            <p14:sldId id="265"/>
           </p14:sldIdLst>
         </p14:section>
       </p14:sectionLst>
@@ -580,6 +582,96 @@
 </p:notes>
 </file>
 
+<file path=ppt/notesSlides/notesSlide10.xml><?xml version="1.0" encoding="utf-8"?>
+<p:notes xmlns:a="http://schemas.openxmlformats.org/drawingml/2006/main" xmlns:r="http://schemas.openxmlformats.org/officeDocument/2006/relationships" xmlns:p="http://schemas.openxmlformats.org/presentationml/2006/main">
+  <p:cSld>
+    <p:spTree>
+      <p:nvGrpSpPr>
+        <p:cNvPr id="1" name=""/>
+        <p:cNvGrpSpPr/>
+        <p:nvPr/>
+      </p:nvGrpSpPr>
+      <p:grpSpPr>
+        <a:xfrm>
+          <a:off x="0" y="0"/>
+          <a:ext cx="0" cy="0"/>
+          <a:chOff x="0" y="0"/>
+          <a:chExt cx="0" cy="0"/>
+        </a:xfrm>
+      </p:grpSpPr>
+      <p:sp>
+        <p:nvSpPr>
+          <p:cNvPr id="2" name="Slide Image Placeholder 1"/>
+          <p:cNvSpPr>
+            <a:spLocks noGrp="1" noRot="1" noChangeAspect="1"/>
+          </p:cNvSpPr>
+          <p:nvPr>
+            <p:ph type="sldImg"/>
+          </p:nvPr>
+        </p:nvSpPr>
+        <p:spPr/>
+      </p:sp>
+      <p:sp>
+        <p:nvSpPr>
+          <p:cNvPr id="3" name="Notes Placeholder 2"/>
+          <p:cNvSpPr>
+            <a:spLocks noGrp="1"/>
+          </p:cNvSpPr>
+          <p:nvPr>
+            <p:ph type="body" idx="1"/>
+          </p:nvPr>
+        </p:nvSpPr>
+        <p:spPr/>
+        <p:txBody>
+          <a:bodyPr/>
+          <a:lstStyle/>
+          <a:p>
+            <a:r>
+              <a:rPr lang="en-US" dirty="0"/>
+              <a:t>Before we finish, go back to the question we began with: What can I show and explain, and what will I learn next?
+Copy this sentence into your notebook and make it yours. I can show my work, explain it, change one part of it, and name what I will learn next.
+Then save your notebook, close it and open it again to check it saved.</a:t>
+            </a:r>
+            <a:endParaRPr lang="en-US" dirty="0"/>
+          </a:p>
+        </p:txBody>
+      </p:sp>
+      <p:sp>
+        <p:nvSpPr>
+          <p:cNvPr id="4" name="Slide Number Placeholder 3"/>
+          <p:cNvSpPr>
+            <a:spLocks noGrp="1"/>
+          </p:cNvSpPr>
+          <p:nvPr>
+            <p:ph type="sldNum" sz="quarter" idx="10"/>
+          </p:nvPr>
+        </p:nvSpPr>
+        <p:spPr/>
+        <p:txBody>
+          <a:bodyPr/>
+          <a:lstStyle/>
+          <a:p>
+            <a:fld id="{F7021451-1387-4CA6-816F-3879F97B5CBC}" type="slidenum">
+              <a:rPr lang="en-US"/>
+              <a:t>10</a:t>
+            </a:fld>
+            <a:endParaRPr lang="en-US"/>
+          </a:p>
+        </p:txBody>
+      </p:sp>
+    </p:spTree>
+    <p:extLst>
+      <p:ext uri="{BB962C8B-B14F-4D97-AF65-F5344CB8AC3E}">
+        <p14:creationId xmlns:p14="http://schemas.microsoft.com/office/powerpoint/2010/main" val="1024086991"/>
+      </p:ext>
+    </p:extLst>
+  </p:cSld>
+  <p:clrMapOvr>
+    <a:masterClrMapping/>
+  </p:clrMapOvr>
+</p:notes>
+</file>
+
 <file path=ppt/notesSlides/notesSlide2.xml><?xml version="1.0" encoding="utf-8"?>
 <p:notes xmlns:a="http://schemas.openxmlformats.org/drawingml/2006/main" xmlns:r="http://schemas.openxmlformats.org/officeDocument/2006/relationships" xmlns:p="http://schemas.openxmlformats.org/presentationml/2006/main">
   <p:cSld>
@@ -1072,7 +1164,8 @@
             <a:r>
               <a:rPr lang="en-US" dirty="0"/>
               <a:t>Now you do the real work yourself. Start with the first step. If you get stuck for a few minutes, read your error message, check the error card, and then ask me.
-Save it as DA24. I will come round to each of you and ask what you changed and how you checked it.</a:t>
+Save it as DA24. I will come round to each of you and ask what you changed and how you checked it.
+The rest of the brief is on the next slide.</a:t>
             </a:r>
             <a:endParaRPr lang="en-US" dirty="0"/>
           </a:p>
@@ -1160,10 +1253,7 @@
           <a:p>
             <a:r>
               <a:rPr lang="en-US" dirty="0"/>
-              <a:t>Two things are likely to go wrong today. It helps to know them before they happen.
-This is the first one. You will see: The notebook will not open on the day. It means this: the file or environment was not tested on the showcase laptop. To fix it, use the PDF and screenshots, explain the workflow, and arrange a short live rerun afterwards.
-The next one. You will see: A question about the code cannot be answered. It means this: the student has not traced that line since they wrote it. To fix it, say what the line is meant to do, then run it on a small input to show it.
-If you meet one of these, fix it and carry on. It happens to everyone.</a:t>
+              <a:t>Here is the rest of the brief. Take your time, and save your work as you go, because a saved file is the only thing I can mark.</a:t>
             </a:r>
             <a:endParaRPr lang="en-US" dirty="0"/>
           </a:p>
@@ -1251,9 +1341,10 @@
           <a:p>
             <a:r>
               <a:rPr lang="en-US" dirty="0"/>
-              <a:t>Before we finish, go back to the question we began with: What can I show and explain, and what will I learn next?
-Copy this sentence into your notebook and make it yours. I can show my work, explain it, change one part of it, and name what I will learn next.
-Then save your notebook, close it and open it again to check it saved.</a:t>
+              <a:t>Two things are likely to go wrong today. It helps to know them before they happen.
+This is the first one. You will see: The notebook will not open on the day. It means this: the file or environment was not tested on the showcase laptop. To fix it, use the PDF and screenshots, explain the workflow, and arrange a short live rerun afterwards.
+The next one. You will see: A question about the code cannot be answered. It means this: the student has not traced that line since they wrote it. To fix it, say what the line is meant to do, then run it on a small input to show it.
+If you meet one of these, fix it and carry on. It happens to everyone.</a:t>
             </a:r>
             <a:endParaRPr lang="en-US" dirty="0"/>
           </a:p>
@@ -1987,7 +2078,24 @@
                 <a:ea typeface="Lato" pitchFamily="34" charset="-122"/>
                 <a:cs typeface="Lato" pitchFamily="34" charset="-120"/>
               </a:rPr>
-              <a:t>Parent showcase and next steps</a:t>
+              <a:t>Parent showcase</a:t>
+            </a:r>
+            <a:endParaRPr lang="en-US" sz="5600" dirty="0"/>
+          </a:p>
+          <a:p>
+            <a:pPr algn="l" indent="0" marL="0">
+              <a:buNone/>
+            </a:pPr>
+            <a:r>
+              <a:rPr lang="en-US" sz="5600" b="1" dirty="0">
+                <a:solidFill>
+                  <a:srgbClr val="FFFFFF"/>
+                </a:solidFill>
+                <a:latin typeface="Lato" pitchFamily="34" charset="0"/>
+                <a:ea typeface="Lato" pitchFamily="34" charset="-122"/>
+                <a:cs typeface="Lato" pitchFamily="34" charset="-120"/>
+              </a:rPr>
+              <a:t>and next steps</a:t>
             </a:r>
             <a:endParaRPr lang="en-US" sz="5600" dirty="0"/>
           </a:p>
@@ -2094,6 +2202,231 @@
               <a:t>Holiday Data and AI Camp  |  The National ICT Innovation Hub, Nakawa</a:t>
             </a:r>
             <a:endParaRPr lang="en-US" sz="1600" dirty="0"/>
+          </a:p>
+        </p:txBody>
+      </p:sp>
+    </p:spTree>
+  </p:cSld>
+  <p:clrMapOvr>
+    <a:masterClrMapping/>
+  </p:clrMapOvr>
+</p:sld>
+</file>
+
+<file path=ppt/slides/slide10.xml><?xml version="1.0" encoding="utf-8"?>
+<p:sld xmlns:a="http://schemas.openxmlformats.org/drawingml/2006/main" xmlns:r="http://schemas.openxmlformats.org/officeDocument/2006/relationships" xmlns:p="http://schemas.openxmlformats.org/presentationml/2006/main">
+  <p:cSld name="Slide 10">
+    <p:spTree>
+      <p:nvGrpSpPr>
+        <p:cNvPr id="1" name=""/>
+        <p:cNvGrpSpPr/>
+        <p:nvPr/>
+      </p:nvGrpSpPr>
+      <p:grpSpPr>
+        <a:xfrm>
+          <a:off x="0" y="0"/>
+          <a:ext cx="0" cy="0"/>
+          <a:chOff x="0" y="0"/>
+          <a:chExt cx="0" cy="0"/>
+        </a:xfrm>
+      </p:grpSpPr>
+      <p:sp>
+        <p:nvSpPr>
+          <p:cNvPr id="2" name="Text 1"/>
+          <p:cNvSpPr/>
+          <p:nvPr>
+            <p:ph idx="102" type="title" hasCustomPrompt="1"/>
+          </p:nvPr>
+        </p:nvSpPr>
+        <p:spPr>
+          <a:xfrm>
+            <a:off x="640080" y="384048"/>
+            <a:ext cx="10881360" cy="1051560"/>
+          </a:xfrm>
+          <a:prstGeom prst="rect">
+            <a:avLst/>
+          </a:prstGeom>
+          <a:noFill/>
+          <a:ln/>
+        </p:spPr>
+        <p:txBody>
+          <a:bodyPr wrap="square" lIns="0" tIns="0" rIns="0" bIns="0" rtlCol="0" anchor="t"/>
+          <a:lstStyle/>
+          <a:p>
+            <a:pPr algn="l" indent="0" marL="0">
+              <a:buNone/>
+            </a:pPr>
+            <a:r>
+              <a:rPr lang="en-US" sz="3800" b="1" dirty="0">
+                <a:solidFill>
+                  <a:srgbClr val="111111"/>
+                </a:solidFill>
+                <a:latin typeface="Lato" pitchFamily="34" charset="0"/>
+                <a:ea typeface="Lato" pitchFamily="34" charset="-122"/>
+                <a:cs typeface="Lato" pitchFamily="34" charset="-120"/>
+              </a:rPr>
+              <a:t>Finish this sentence in your notebook</a:t>
+            </a:r>
+            <a:endParaRPr lang="en-US" sz="3800" dirty="0"/>
+          </a:p>
+        </p:txBody>
+      </p:sp>
+      <p:sp>
+        <p:nvSpPr>
+          <p:cNvPr id="3" name="Text 1"/>
+          <p:cNvSpPr txBox="1"/>
+          <p:nvPr/>
+        </p:nvSpPr>
+        <p:spPr>
+          <a:xfrm>
+            <a:off x="640080" y="1737360"/>
+            <a:ext cx="6949440" cy="2926080"/>
+          </a:xfrm>
+          <a:prstGeom prst="rect">
+            <a:avLst/>
+          </a:prstGeom>
+          <a:noFill/>
+          <a:ln/>
+        </p:spPr>
+        <p:txBody>
+          <a:bodyPr wrap="square" lIns="0" tIns="0" rIns="0" bIns="0" rtlCol="0" anchor="t"/>
+          <a:lstStyle/>
+          <a:p>
+            <a:pPr algn="l" indent="0" marL="0">
+              <a:lnSpc>
+                <a:spcPts val="4800"/>
+              </a:lnSpc>
+              <a:spcAft>
+                <a:spcPts val="1010"/>
+              </a:spcAft>
+              <a:buNone/>
+            </a:pPr>
+            <a:r>
+              <a:rPr lang="en-US" sz="4000" dirty="0">
+                <a:solidFill>
+                  <a:srgbClr val="111111"/>
+                </a:solidFill>
+                <a:latin typeface="Lato" pitchFamily="34" charset="0"/>
+                <a:ea typeface="Lato" pitchFamily="34" charset="-122"/>
+                <a:cs typeface="Lato" pitchFamily="34" charset="-120"/>
+              </a:rPr>
+              <a:t>I can show my work, explain it, change one part of it, and name what I will learn next.</a:t>
+            </a:r>
+            <a:endParaRPr lang="en-US" sz="4000" dirty="0"/>
+          </a:p>
+        </p:txBody>
+      </p:sp>
+      <p:sp>
+        <p:nvSpPr>
+          <p:cNvPr id="4" name="Text 2"/>
+          <p:cNvSpPr txBox="1"/>
+          <p:nvPr/>
+        </p:nvSpPr>
+        <p:spPr>
+          <a:xfrm>
+            <a:off x="640080" y="4846320"/>
+            <a:ext cx="6949440" cy="1097280"/>
+          </a:xfrm>
+          <a:prstGeom prst="rect">
+            <a:avLst/>
+          </a:prstGeom>
+          <a:noFill/>
+          <a:ln/>
+        </p:spPr>
+        <p:txBody>
+          <a:bodyPr wrap="square" lIns="0" tIns="0" rIns="0" bIns="0" rtlCol="0" anchor="t"/>
+          <a:lstStyle/>
+          <a:p>
+            <a:pPr algn="l" indent="0" marL="0">
+              <a:lnSpc>
+                <a:spcPts val="2750"/>
+              </a:lnSpc>
+              <a:buNone/>
+            </a:pPr>
+            <a:r>
+              <a:rPr lang="en-US" sz="2200" dirty="0">
+                <a:solidFill>
+                  <a:srgbClr val="333333"/>
+                </a:solidFill>
+                <a:latin typeface="Lato" pitchFamily="34" charset="0"/>
+                <a:ea typeface="Lato" pitchFamily="34" charset="-122"/>
+                <a:cs typeface="Lato" pitchFamily="34" charset="-120"/>
+              </a:rPr>
+              <a:t>Then save your notebook, close it and open it again to check it saved.</a:t>
+            </a:r>
+            <a:endParaRPr lang="en-US" sz="2200" dirty="0"/>
+          </a:p>
+        </p:txBody>
+      </p:sp>
+      <p:pic>
+        <p:nvPicPr>
+          <p:cNvPr id="5" name="Image 0" descr="Finished">    </p:cNvPr>
+          <p:cNvPicPr>
+            <a:picLocks noChangeAspect="1"/>
+          </p:cNvPicPr>
+          <p:nvPr/>
+        </p:nvPicPr>
+        <p:blipFill>
+          <a:blip r:embed="rId1"/>
+          <a:stretch>
+            <a:fillRect/>
+          </a:stretch>
+        </p:blipFill>
+        <p:spPr>
+          <a:xfrm>
+            <a:off x="8229600" y="1920240"/>
+            <a:ext cx="3291840" cy="3291840"/>
+          </a:xfrm>
+          <a:prstGeom prst="rect">
+            <a:avLst/>
+          </a:prstGeom>
+        </p:spPr>
+      </p:pic>
+      <p:sp>
+        <p:nvSpPr>
+          <p:cNvPr id="25" name="Slide Number Placeholder 0"/>
+          <p:cNvSpPr>
+            <a:spLocks noGrp="1"/>
+          </p:cNvSpPr>
+          <p:nvPr>
+            <p:ph type="sldNum" sz="quarter" idx="4294967295"/>
+          </p:nvPr>
+        </p:nvSpPr>
+        <p:spPr>
+          <a:xfrm>
+            <a:off x="10607040" y="6400800"/>
+            <a:ext cx="941832" cy="274320"/>
+          </a:xfrm>
+          <a:prstGeom prst="rect">
+            <a:avLst/>
+          </a:prstGeom>
+          <a:extLst>
+            <a:ext uri="{C572A759-6A51-4108-AA02-DFA0A04FC94B}">
+              <ma14:wrappingTextBoxFlag xmlns:ma14="http://schemas.microsoft.com/office/mac/drawingml/2011/main" val="0"/>
+            </a:ext>
+          </a:extLst>
+        </p:spPr>
+        <p:txBody>
+          <a:bodyPr/>
+          <a:lstStyle>
+            <a:lvl1pPr>
+              <a:defRPr sz="1200">
+                <a:solidFill>
+                  <a:srgbClr val="666666"/>
+                </a:solidFill>
+                <a:latin typeface="Lato"/>
+                <a:ea typeface="Lato"/>
+                <a:cs typeface="Lato"/>
+              </a:defRPr>
+            </a:lvl1pPr>
+          </a:lstStyle>
+          <a:p>
+            <a:pPr algn="r"/>
+            <a:fld id="{F7021451-1387-4CA6-816F-3879F97B5CBC}" type="slidenum">
+              <a:rPr b="0" lang="en-US"/>
+              <a:t>10</a:t>
+            </a:fld>
+            <a:endParaRPr lang="en-US"/>
           </a:p>
         </p:txBody>
       </p:sp>
@@ -3130,7 +3463,7 @@
                 <a:ea typeface="Lato" pitchFamily="34" charset="-122"/>
                 <a:cs typeface="Lato" pitchFamily="34" charset="-120"/>
               </a:rPr>
-              <a:t>Make: your own version</a:t>
+              <a:t>Make: your own version (1 of 2)</a:t>
             </a:r>
             <a:endParaRPr lang="en-US" sz="3800" dirty="0"/>
           </a:p>
@@ -3159,15 +3492,15 @@
           <a:p>
             <a:pPr algn="l" indent="0" marL="0">
               <a:lnSpc>
-                <a:spcPts val="2880"/>
+                <a:spcPts val="3360"/>
               </a:lnSpc>
               <a:spcAft>
-                <a:spcPts val="2520"/>
+                <a:spcPts val="2020"/>
               </a:spcAft>
               <a:buNone/>
             </a:pPr>
             <a:r>
-              <a:rPr lang="en-US" sz="2400" dirty="0">
+              <a:rPr lang="en-US" sz="2800" dirty="0">
                 <a:solidFill>
                   <a:srgbClr val="111111"/>
                 </a:solidFill>
@@ -3175,22 +3508,22 @@
                 <a:ea typeface="Lato" pitchFamily="34" charset="-122"/>
                 <a:cs typeface="Lato" pitchFamily="34" charset="-120"/>
               </a:rPr>
-              <a:t>Present your project for five minutes and answer three minutes of questions. Explain one calculation, one chart and one limitation. The instructor then chooses one small change, and you make it unaided. Close assistant windows and turn off generative suggestions first. Acknowledge any help you had. Choose one next learning goal. Keep your project folder and feedback.</a:t>
-            </a:r>
-            <a:endParaRPr lang="en-US" sz="2400" dirty="0"/>
+              <a:t>Present your project for five minutes and answer three minutes of questions.</a:t>
+            </a:r>
+            <a:endParaRPr lang="en-US" sz="2800" dirty="0"/>
           </a:p>
           <a:p>
             <a:pPr algn="l" indent="0" marL="0">
               <a:lnSpc>
-                <a:spcPts val="2880"/>
+                <a:spcPts val="3360"/>
               </a:lnSpc>
               <a:spcAft>
-                <a:spcPts val="2520"/>
+                <a:spcPts val="2020"/>
               </a:spcAft>
               <a:buNone/>
             </a:pPr>
             <a:r>
-              <a:rPr lang="en-US" sz="2400" dirty="0">
+              <a:rPr lang="en-US" sz="2800" dirty="0">
                 <a:solidFill>
                   <a:srgbClr val="111111"/>
                 </a:solidFill>
@@ -3198,9 +3531,32 @@
                 <a:ea typeface="Lato" pitchFamily="34" charset="-122"/>
                 <a:cs typeface="Lato" pitchFamily="34" charset="-120"/>
               </a:rPr>
-              <a:t>Save it as DA24. Write two sentences: what you changed and how you checked it.</a:t>
-            </a:r>
-            <a:endParaRPr lang="en-US" sz="2400" dirty="0"/>
+              <a:t>Explain one calculation, one chart and one limitation.</a:t>
+            </a:r>
+            <a:endParaRPr lang="en-US" sz="2800" dirty="0"/>
+          </a:p>
+          <a:p>
+            <a:pPr algn="l" indent="0" marL="0">
+              <a:lnSpc>
+                <a:spcPts val="3360"/>
+              </a:lnSpc>
+              <a:spcAft>
+                <a:spcPts val="2020"/>
+              </a:spcAft>
+              <a:buNone/>
+            </a:pPr>
+            <a:r>
+              <a:rPr lang="en-US" sz="2800" dirty="0">
+                <a:solidFill>
+                  <a:srgbClr val="111111"/>
+                </a:solidFill>
+                <a:latin typeface="Lato" pitchFamily="34" charset="0"/>
+                <a:ea typeface="Lato" pitchFamily="34" charset="-122"/>
+                <a:cs typeface="Lato" pitchFamily="34" charset="-120"/>
+              </a:rPr>
+              <a:t>The instructor then chooses one small change, and you make it unaided.</a:t>
+            </a:r>
+            <a:endParaRPr lang="en-US" sz="2800" dirty="0"/>
           </a:p>
         </p:txBody>
       </p:sp>
@@ -3336,15 +3692,152 @@
                 <a:ea typeface="Lato" pitchFamily="34" charset="-122"/>
                 <a:cs typeface="Lato" pitchFamily="34" charset="-120"/>
               </a:rPr>
-              <a:t>Two errors you may meet today</a:t>
+              <a:t>Make: your own version (2 of 2)</a:t>
             </a:r>
             <a:endParaRPr lang="en-US" sz="3800" dirty="0"/>
+          </a:p>
+        </p:txBody>
+      </p:sp>
+      <p:sp>
+        <p:nvSpPr>
+          <p:cNvPr id="3" name="Text 1"/>
+          <p:cNvSpPr txBox="1"/>
+          <p:nvPr/>
+        </p:nvSpPr>
+        <p:spPr>
+          <a:xfrm>
+            <a:off x="640080" y="1737360"/>
+            <a:ext cx="6949440" cy="4480560"/>
+          </a:xfrm>
+          <a:prstGeom prst="rect">
+            <a:avLst/>
+          </a:prstGeom>
+          <a:noFill/>
+          <a:ln/>
+        </p:spPr>
+        <p:txBody>
+          <a:bodyPr wrap="square" lIns="0" tIns="0" rIns="0" bIns="0" rtlCol="0" anchor="t"/>
+          <a:lstStyle/>
+          <a:p>
+            <a:pPr algn="l" indent="0" marL="0">
+              <a:lnSpc>
+                <a:spcPts val="3240"/>
+              </a:lnSpc>
+              <a:spcAft>
+                <a:spcPts val="2020"/>
+              </a:spcAft>
+              <a:buNone/>
+            </a:pPr>
+            <a:r>
+              <a:rPr lang="en-US" sz="2700" dirty="0">
+                <a:solidFill>
+                  <a:srgbClr val="111111"/>
+                </a:solidFill>
+                <a:latin typeface="Lato" pitchFamily="34" charset="0"/>
+                <a:ea typeface="Lato" pitchFamily="34" charset="-122"/>
+                <a:cs typeface="Lato" pitchFamily="34" charset="-120"/>
+              </a:rPr>
+              <a:t>Close assistant windows and turn off generative suggestions first.</a:t>
+            </a:r>
+            <a:endParaRPr lang="en-US" sz="2700" dirty="0"/>
+          </a:p>
+          <a:p>
+            <a:pPr algn="l" indent="0" marL="0">
+              <a:lnSpc>
+                <a:spcPts val="3240"/>
+              </a:lnSpc>
+              <a:spcAft>
+                <a:spcPts val="2020"/>
+              </a:spcAft>
+              <a:buNone/>
+            </a:pPr>
+            <a:r>
+              <a:rPr lang="en-US" sz="2700" dirty="0">
+                <a:solidFill>
+                  <a:srgbClr val="111111"/>
+                </a:solidFill>
+                <a:latin typeface="Lato" pitchFamily="34" charset="0"/>
+                <a:ea typeface="Lato" pitchFamily="34" charset="-122"/>
+                <a:cs typeface="Lato" pitchFamily="34" charset="-120"/>
+              </a:rPr>
+              <a:t>Acknowledge any help you had.</a:t>
+            </a:r>
+            <a:endParaRPr lang="en-US" sz="2700" dirty="0"/>
+          </a:p>
+          <a:p>
+            <a:pPr algn="l" indent="0" marL="0">
+              <a:lnSpc>
+                <a:spcPts val="3240"/>
+              </a:lnSpc>
+              <a:spcAft>
+                <a:spcPts val="2020"/>
+              </a:spcAft>
+              <a:buNone/>
+            </a:pPr>
+            <a:r>
+              <a:rPr lang="en-US" sz="2700" dirty="0">
+                <a:solidFill>
+                  <a:srgbClr val="111111"/>
+                </a:solidFill>
+                <a:latin typeface="Lato" pitchFamily="34" charset="0"/>
+                <a:ea typeface="Lato" pitchFamily="34" charset="-122"/>
+                <a:cs typeface="Lato" pitchFamily="34" charset="-120"/>
+              </a:rPr>
+              <a:t>Choose one next learning goal.</a:t>
+            </a:r>
+            <a:endParaRPr lang="en-US" sz="2700" dirty="0"/>
+          </a:p>
+          <a:p>
+            <a:pPr algn="l" indent="0" marL="0">
+              <a:lnSpc>
+                <a:spcPts val="3240"/>
+              </a:lnSpc>
+              <a:spcAft>
+                <a:spcPts val="2020"/>
+              </a:spcAft>
+              <a:buNone/>
+            </a:pPr>
+            <a:r>
+              <a:rPr lang="en-US" sz="2700" dirty="0">
+                <a:solidFill>
+                  <a:srgbClr val="111111"/>
+                </a:solidFill>
+                <a:latin typeface="Lato" pitchFamily="34" charset="0"/>
+                <a:ea typeface="Lato" pitchFamily="34" charset="-122"/>
+                <a:cs typeface="Lato" pitchFamily="34" charset="-120"/>
+              </a:rPr>
+              <a:t>Keep your project folder and feedback.</a:t>
+            </a:r>
+            <a:endParaRPr lang="en-US" sz="2700" dirty="0"/>
+          </a:p>
+          <a:p>
+            <a:pPr algn="l" indent="0" marL="0">
+              <a:lnSpc>
+                <a:spcPts val="3240"/>
+              </a:lnSpc>
+              <a:spcAft>
+                <a:spcPts val="2020"/>
+              </a:spcAft>
+              <a:buNone/>
+            </a:pPr>
+            <a:r>
+              <a:rPr lang="en-US" sz="2700" dirty="0">
+                <a:solidFill>
+                  <a:srgbClr val="111111"/>
+                </a:solidFill>
+                <a:latin typeface="Lato" pitchFamily="34" charset="0"/>
+                <a:ea typeface="Lato" pitchFamily="34" charset="-122"/>
+                <a:cs typeface="Lato" pitchFamily="34" charset="-120"/>
+              </a:rPr>
+              <a:t>Save it as DA24. Write two sentences: what you changed and how you checked it.</a:t>
+            </a:r>
+            <a:endParaRPr lang="en-US" sz="2700" dirty="0"/>
           </a:p>
         </p:txBody>
       </p:sp>
       <p:pic>
         <p:nvPicPr>
-          <p:cNvPr id="3" name="Image 0" descr="Error">    </p:cNvPr>
+          <p:cNvPr id="4" name="Image 0" descr="A notebook saved with a tick">    </p:cNvPr>
           <p:cNvPicPr>
             <a:picLocks noChangeAspect="1"/>
           </p:cNvPicPr>
@@ -3358,335 +3851,14 @@
         </p:blipFill>
         <p:spPr>
           <a:xfrm>
-            <a:off x="640080" y="1691640"/>
-            <a:ext cx="822960" cy="822960"/>
+            <a:off x="8138160" y="1920240"/>
+            <a:ext cx="3474720" cy="3291840"/>
           </a:xfrm>
           <a:prstGeom prst="rect">
             <a:avLst/>
           </a:prstGeom>
         </p:spPr>
       </p:pic>
-      <p:sp>
-        <p:nvSpPr>
-          <p:cNvPr id="4" name="Shape 1"/>
-          <p:cNvSpPr/>
-          <p:nvPr/>
-        </p:nvSpPr>
-        <p:spPr>
-          <a:xfrm>
-            <a:off x="1645920" y="1828800"/>
-            <a:ext cx="4023360" cy="1645920"/>
-          </a:xfrm>
-          <a:prstGeom prst="roundRect">
-            <a:avLst>
-              <a:gd name="adj" fmla="val 3333"/>
-            </a:avLst>
-          </a:prstGeom>
-          <a:solidFill>
-            <a:srgbClr val="FFFFFF"/>
-          </a:solidFill>
-          <a:ln w="25400">
-            <a:solidFill>
-              <a:srgbClr val="AE2525"/>
-            </a:solidFill>
-            <a:prstDash val="solid"/>
-          </a:ln>
-        </p:spPr>
-      </p:sp>
-      <p:sp>
-        <p:nvSpPr>
-          <p:cNvPr id="5" name="Text 2"/>
-          <p:cNvSpPr txBox="1"/>
-          <p:nvPr/>
-        </p:nvSpPr>
-        <p:spPr>
-          <a:xfrm>
-            <a:off x="1783080" y="1920240"/>
-            <a:ext cx="3749040" cy="1463040"/>
-          </a:xfrm>
-          <a:prstGeom prst="rect">
-            <a:avLst/>
-          </a:prstGeom>
-          <a:noFill/>
-          <a:ln/>
-        </p:spPr>
-        <p:txBody>
-          <a:bodyPr wrap="square" lIns="0" tIns="0" rIns="0" bIns="0" rtlCol="0" anchor="ctr"/>
-          <a:lstStyle/>
-          <a:p>
-            <a:pPr algn="l" indent="0" marL="0">
-              <a:lnSpc>
-                <a:spcPts val="2500"/>
-              </a:lnSpc>
-              <a:buNone/>
-            </a:pPr>
-            <a:r>
-              <a:rPr lang="en-US" sz="2000" dirty="0">
-                <a:solidFill>
-                  <a:srgbClr val="AE2525"/>
-                </a:solidFill>
-                <a:latin typeface="Courier New" pitchFamily="34" charset="0"/>
-                <a:ea typeface="Courier New" pitchFamily="34" charset="-122"/>
-                <a:cs typeface="Courier New" pitchFamily="34" charset="-120"/>
-              </a:rPr>
-              <a:t>The notebook will not open on the day</a:t>
-            </a:r>
-            <a:endParaRPr lang="en-US" sz="2000" dirty="0"/>
-          </a:p>
-        </p:txBody>
-      </p:sp>
-      <p:sp>
-        <p:nvSpPr>
-          <p:cNvPr id="6" name="Text 3"/>
-          <p:cNvSpPr txBox="1"/>
-          <p:nvPr/>
-        </p:nvSpPr>
-        <p:spPr>
-          <a:xfrm>
-            <a:off x="6035040" y="1664208"/>
-            <a:ext cx="5486400" cy="1965960"/>
-          </a:xfrm>
-          <a:prstGeom prst="rect">
-            <a:avLst/>
-          </a:prstGeom>
-          <a:noFill/>
-          <a:ln/>
-        </p:spPr>
-        <p:txBody>
-          <a:bodyPr wrap="square" lIns="0" tIns="0" rIns="0" bIns="0" rtlCol="0" anchor="t"/>
-          <a:lstStyle/>
-          <a:p>
-            <a:pPr algn="l" indent="0" marL="0">
-              <a:lnSpc>
-                <a:spcPts val="2640"/>
-              </a:lnSpc>
-              <a:spcAft>
-                <a:spcPts val="1300"/>
-              </a:spcAft>
-              <a:buNone/>
-            </a:pPr>
-            <a:r>
-              <a:rPr lang="en-US" sz="2200" dirty="0">
-                <a:solidFill>
-                  <a:srgbClr val="111111"/>
-                </a:solidFill>
-                <a:latin typeface="Lato" pitchFamily="34" charset="0"/>
-                <a:ea typeface="Lato" pitchFamily="34" charset="-122"/>
-                <a:cs typeface="Lato" pitchFamily="34" charset="-120"/>
-              </a:rPr>
-              <a:t>It means: The file or environment was not tested on the showcase laptop.</a:t>
-            </a:r>
-            <a:endParaRPr lang="en-US" sz="2200" dirty="0"/>
-          </a:p>
-          <a:p>
-            <a:pPr algn="l" indent="0" marL="0">
-              <a:lnSpc>
-                <a:spcPts val="2640"/>
-              </a:lnSpc>
-              <a:spcAft>
-                <a:spcPts val="1300"/>
-              </a:spcAft>
-              <a:buNone/>
-            </a:pPr>
-            <a:r>
-              <a:rPr lang="en-US" sz="2200" dirty="0">
-                <a:solidFill>
-                  <a:srgbClr val="111111"/>
-                </a:solidFill>
-                <a:latin typeface="Lato" pitchFamily="34" charset="0"/>
-                <a:ea typeface="Lato" pitchFamily="34" charset="-122"/>
-                <a:cs typeface="Lato" pitchFamily="34" charset="-120"/>
-              </a:rPr>
-              <a:t>Fix: Use the PDF and screenshots, explain the workflow, and arrange a short live rerun afterwards.</a:t>
-            </a:r>
-            <a:endParaRPr lang="en-US" sz="2200" dirty="0"/>
-          </a:p>
-        </p:txBody>
-      </p:sp>
-      <p:sp>
-        <p:nvSpPr>
-          <p:cNvPr id="7" name="Shape 4"/>
-          <p:cNvSpPr/>
-          <p:nvPr/>
-        </p:nvSpPr>
-        <p:spPr>
-          <a:xfrm>
-            <a:off x="640080" y="3813048"/>
-            <a:ext cx="10881360" cy="0"/>
-          </a:xfrm>
-          <a:prstGeom prst="line">
-            <a:avLst/>
-          </a:prstGeom>
-          <a:noFill/>
-          <a:ln w="12700">
-            <a:solidFill>
-              <a:srgbClr val="CFCFCF"/>
-            </a:solidFill>
-            <a:prstDash val="solid"/>
-          </a:ln>
-        </p:spPr>
-      </p:sp>
-      <p:pic>
-        <p:nvPicPr>
-          <p:cNvPr id="8" name="Image 1" descr="Error">    </p:cNvPr>
-          <p:cNvPicPr>
-            <a:picLocks noChangeAspect="1"/>
-          </p:cNvPicPr>
-          <p:nvPr/>
-        </p:nvPicPr>
-        <p:blipFill>
-          <a:blip r:embed="rId2"/>
-          <a:stretch>
-            <a:fillRect/>
-          </a:stretch>
-        </p:blipFill>
-        <p:spPr>
-          <a:xfrm>
-            <a:off x="640080" y="4023360"/>
-            <a:ext cx="822960" cy="822960"/>
-          </a:xfrm>
-          <a:prstGeom prst="rect">
-            <a:avLst/>
-          </a:prstGeom>
-        </p:spPr>
-      </p:pic>
-      <p:sp>
-        <p:nvSpPr>
-          <p:cNvPr id="9" name="Shape 5"/>
-          <p:cNvSpPr/>
-          <p:nvPr/>
-        </p:nvSpPr>
-        <p:spPr>
-          <a:xfrm>
-            <a:off x="1645920" y="4160520"/>
-            <a:ext cx="4023360" cy="1645920"/>
-          </a:xfrm>
-          <a:prstGeom prst="roundRect">
-            <a:avLst>
-              <a:gd name="adj" fmla="val 3333"/>
-            </a:avLst>
-          </a:prstGeom>
-          <a:solidFill>
-            <a:srgbClr val="FFFFFF"/>
-          </a:solidFill>
-          <a:ln w="25400">
-            <a:solidFill>
-              <a:srgbClr val="AE2525"/>
-            </a:solidFill>
-            <a:prstDash val="solid"/>
-          </a:ln>
-        </p:spPr>
-      </p:sp>
-      <p:sp>
-        <p:nvSpPr>
-          <p:cNvPr id="10" name="Text 6"/>
-          <p:cNvSpPr txBox="1"/>
-          <p:nvPr/>
-        </p:nvSpPr>
-        <p:spPr>
-          <a:xfrm>
-            <a:off x="1783080" y="4251960"/>
-            <a:ext cx="3749040" cy="1463040"/>
-          </a:xfrm>
-          <a:prstGeom prst="rect">
-            <a:avLst/>
-          </a:prstGeom>
-          <a:noFill/>
-          <a:ln/>
-        </p:spPr>
-        <p:txBody>
-          <a:bodyPr wrap="square" lIns="0" tIns="0" rIns="0" bIns="0" rtlCol="0" anchor="ctr"/>
-          <a:lstStyle/>
-          <a:p>
-            <a:pPr algn="l" indent="0" marL="0">
-              <a:lnSpc>
-                <a:spcPts val="2500"/>
-              </a:lnSpc>
-              <a:buNone/>
-            </a:pPr>
-            <a:r>
-              <a:rPr lang="en-US" sz="2000" dirty="0">
-                <a:solidFill>
-                  <a:srgbClr val="AE2525"/>
-                </a:solidFill>
-                <a:latin typeface="Courier New" pitchFamily="34" charset="0"/>
-                <a:ea typeface="Courier New" pitchFamily="34" charset="-122"/>
-                <a:cs typeface="Courier New" pitchFamily="34" charset="-120"/>
-              </a:rPr>
-              <a:t>A question about the code cannot be answered</a:t>
-            </a:r>
-            <a:endParaRPr lang="en-US" sz="2000" dirty="0"/>
-          </a:p>
-        </p:txBody>
-      </p:sp>
-      <p:sp>
-        <p:nvSpPr>
-          <p:cNvPr id="11" name="Text 7"/>
-          <p:cNvSpPr txBox="1"/>
-          <p:nvPr/>
-        </p:nvSpPr>
-        <p:spPr>
-          <a:xfrm>
-            <a:off x="6035040" y="3995928"/>
-            <a:ext cx="5486400" cy="1965960"/>
-          </a:xfrm>
-          <a:prstGeom prst="rect">
-            <a:avLst/>
-          </a:prstGeom>
-          <a:noFill/>
-          <a:ln/>
-        </p:spPr>
-        <p:txBody>
-          <a:bodyPr wrap="square" lIns="0" tIns="0" rIns="0" bIns="0" rtlCol="0" anchor="t"/>
-          <a:lstStyle/>
-          <a:p>
-            <a:pPr algn="l" indent="0" marL="0">
-              <a:lnSpc>
-                <a:spcPts val="2640"/>
-              </a:lnSpc>
-              <a:spcAft>
-                <a:spcPts val="1300"/>
-              </a:spcAft>
-              <a:buNone/>
-            </a:pPr>
-            <a:r>
-              <a:rPr lang="en-US" sz="2200" dirty="0">
-                <a:solidFill>
-                  <a:srgbClr val="111111"/>
-                </a:solidFill>
-                <a:latin typeface="Lato" pitchFamily="34" charset="0"/>
-                <a:ea typeface="Lato" pitchFamily="34" charset="-122"/>
-                <a:cs typeface="Lato" pitchFamily="34" charset="-120"/>
-              </a:rPr>
-              <a:t>It means: The student has not traced that line since they wrote it.</a:t>
-            </a:r>
-            <a:endParaRPr lang="en-US" sz="2200" dirty="0"/>
-          </a:p>
-          <a:p>
-            <a:pPr algn="l" indent="0" marL="0">
-              <a:lnSpc>
-                <a:spcPts val="2640"/>
-              </a:lnSpc>
-              <a:spcAft>
-                <a:spcPts val="1300"/>
-              </a:spcAft>
-              <a:buNone/>
-            </a:pPr>
-            <a:r>
-              <a:rPr lang="en-US" sz="2200" dirty="0">
-                <a:solidFill>
-                  <a:srgbClr val="111111"/>
-                </a:solidFill>
-                <a:latin typeface="Lato" pitchFamily="34" charset="0"/>
-                <a:ea typeface="Lato" pitchFamily="34" charset="-122"/>
-                <a:cs typeface="Lato" pitchFamily="34" charset="-120"/>
-              </a:rPr>
-              <a:t>Fix: Say what the line is meant to do, then run it on a small input to show it.</a:t>
-            </a:r>
-            <a:endParaRPr lang="en-US" sz="2200" dirty="0"/>
-          </a:p>
-        </p:txBody>
-      </p:sp>
       <p:sp>
         <p:nvSpPr>
           <p:cNvPr id="25" name="Slide Number Placeholder 0"/>
@@ -3795,102 +3967,15 @@
                 <a:ea typeface="Lato" pitchFamily="34" charset="-122"/>
                 <a:cs typeface="Lato" pitchFamily="34" charset="-120"/>
               </a:rPr>
-              <a:t>Finish this sentence in your notebook</a:t>
+              <a:t>Two errors you may meet today</a:t>
             </a:r>
             <a:endParaRPr lang="en-US" sz="3800" dirty="0"/>
-          </a:p>
-        </p:txBody>
-      </p:sp>
-      <p:sp>
-        <p:nvSpPr>
-          <p:cNvPr id="3" name="Text 1"/>
-          <p:cNvSpPr txBox="1"/>
-          <p:nvPr/>
-        </p:nvSpPr>
-        <p:spPr>
-          <a:xfrm>
-            <a:off x="640080" y="1737360"/>
-            <a:ext cx="6949440" cy="2926080"/>
-          </a:xfrm>
-          <a:prstGeom prst="rect">
-            <a:avLst/>
-          </a:prstGeom>
-          <a:noFill/>
-          <a:ln/>
-        </p:spPr>
-        <p:txBody>
-          <a:bodyPr wrap="square" lIns="0" tIns="0" rIns="0" bIns="0" rtlCol="0" anchor="t"/>
-          <a:lstStyle/>
-          <a:p>
-            <a:pPr algn="l" indent="0" marL="0">
-              <a:lnSpc>
-                <a:spcPts val="4800"/>
-              </a:lnSpc>
-              <a:spcAft>
-                <a:spcPts val="1010"/>
-              </a:spcAft>
-              <a:buNone/>
-            </a:pPr>
-            <a:r>
-              <a:rPr lang="en-US" sz="4000" dirty="0">
-                <a:solidFill>
-                  <a:srgbClr val="111111"/>
-                </a:solidFill>
-                <a:latin typeface="Lato" pitchFamily="34" charset="0"/>
-                <a:ea typeface="Lato" pitchFamily="34" charset="-122"/>
-                <a:cs typeface="Lato" pitchFamily="34" charset="-120"/>
-              </a:rPr>
-              <a:t>I can show my work, explain it, change one part of it, and name what I will learn next.</a:t>
-            </a:r>
-            <a:endParaRPr lang="en-US" sz="4000" dirty="0"/>
-          </a:p>
-        </p:txBody>
-      </p:sp>
-      <p:sp>
-        <p:nvSpPr>
-          <p:cNvPr id="4" name="Text 2"/>
-          <p:cNvSpPr txBox="1"/>
-          <p:nvPr/>
-        </p:nvSpPr>
-        <p:spPr>
-          <a:xfrm>
-            <a:off x="640080" y="4846320"/>
-            <a:ext cx="6949440" cy="1097280"/>
-          </a:xfrm>
-          <a:prstGeom prst="rect">
-            <a:avLst/>
-          </a:prstGeom>
-          <a:noFill/>
-          <a:ln/>
-        </p:spPr>
-        <p:txBody>
-          <a:bodyPr wrap="square" lIns="0" tIns="0" rIns="0" bIns="0" rtlCol="0" anchor="t"/>
-          <a:lstStyle/>
-          <a:p>
-            <a:pPr algn="l" indent="0" marL="0">
-              <a:lnSpc>
-                <a:spcPts val="2750"/>
-              </a:lnSpc>
-              <a:buNone/>
-            </a:pPr>
-            <a:r>
-              <a:rPr lang="en-US" sz="2200" dirty="0">
-                <a:solidFill>
-                  <a:srgbClr val="333333"/>
-                </a:solidFill>
-                <a:latin typeface="Lato" pitchFamily="34" charset="0"/>
-                <a:ea typeface="Lato" pitchFamily="34" charset="-122"/>
-                <a:cs typeface="Lato" pitchFamily="34" charset="-120"/>
-              </a:rPr>
-              <a:t>Then save your notebook, close it and open it again to check it saved.</a:t>
-            </a:r>
-            <a:endParaRPr lang="en-US" sz="2200" dirty="0"/>
           </a:p>
         </p:txBody>
       </p:sp>
       <p:pic>
         <p:nvPicPr>
-          <p:cNvPr id="5" name="Image 0" descr="Finished">    </p:cNvPr>
+          <p:cNvPr id="3" name="Image 0" descr="Error">    </p:cNvPr>
           <p:cNvPicPr>
             <a:picLocks noChangeAspect="1"/>
           </p:cNvPicPr>
@@ -3904,14 +3989,335 @@
         </p:blipFill>
         <p:spPr>
           <a:xfrm>
-            <a:off x="8229600" y="1920240"/>
-            <a:ext cx="3291840" cy="3291840"/>
+            <a:off x="640080" y="1691640"/>
+            <a:ext cx="822960" cy="822960"/>
           </a:xfrm>
           <a:prstGeom prst="rect">
             <a:avLst/>
           </a:prstGeom>
         </p:spPr>
       </p:pic>
+      <p:sp>
+        <p:nvSpPr>
+          <p:cNvPr id="4" name="Shape 1"/>
+          <p:cNvSpPr/>
+          <p:nvPr/>
+        </p:nvSpPr>
+        <p:spPr>
+          <a:xfrm>
+            <a:off x="1645920" y="1828800"/>
+            <a:ext cx="4023360" cy="1645920"/>
+          </a:xfrm>
+          <a:prstGeom prst="roundRect">
+            <a:avLst>
+              <a:gd name="adj" fmla="val 3333"/>
+            </a:avLst>
+          </a:prstGeom>
+          <a:solidFill>
+            <a:srgbClr val="FFFFFF"/>
+          </a:solidFill>
+          <a:ln w="25400">
+            <a:solidFill>
+              <a:srgbClr val="AE2525"/>
+            </a:solidFill>
+            <a:prstDash val="solid"/>
+          </a:ln>
+        </p:spPr>
+      </p:sp>
+      <p:sp>
+        <p:nvSpPr>
+          <p:cNvPr id="5" name="Text 2"/>
+          <p:cNvSpPr txBox="1"/>
+          <p:nvPr/>
+        </p:nvSpPr>
+        <p:spPr>
+          <a:xfrm>
+            <a:off x="1783080" y="1920240"/>
+            <a:ext cx="3749040" cy="1463040"/>
+          </a:xfrm>
+          <a:prstGeom prst="rect">
+            <a:avLst/>
+          </a:prstGeom>
+          <a:noFill/>
+          <a:ln/>
+        </p:spPr>
+        <p:txBody>
+          <a:bodyPr wrap="square" lIns="0" tIns="0" rIns="0" bIns="0" rtlCol="0" anchor="ctr"/>
+          <a:lstStyle/>
+          <a:p>
+            <a:pPr algn="l" indent="0" marL="0">
+              <a:lnSpc>
+                <a:spcPts val="2500"/>
+              </a:lnSpc>
+              <a:buNone/>
+            </a:pPr>
+            <a:r>
+              <a:rPr lang="en-US" sz="2000" dirty="0">
+                <a:solidFill>
+                  <a:srgbClr val="AE2525"/>
+                </a:solidFill>
+                <a:latin typeface="Courier New" pitchFamily="34" charset="0"/>
+                <a:ea typeface="Courier New" pitchFamily="34" charset="-122"/>
+                <a:cs typeface="Courier New" pitchFamily="34" charset="-120"/>
+              </a:rPr>
+              <a:t>The notebook will not open on the day</a:t>
+            </a:r>
+            <a:endParaRPr lang="en-US" sz="2000" dirty="0"/>
+          </a:p>
+        </p:txBody>
+      </p:sp>
+      <p:sp>
+        <p:nvSpPr>
+          <p:cNvPr id="6" name="Text 3"/>
+          <p:cNvSpPr txBox="1"/>
+          <p:nvPr/>
+        </p:nvSpPr>
+        <p:spPr>
+          <a:xfrm>
+            <a:off x="6035040" y="1664208"/>
+            <a:ext cx="5486400" cy="1965960"/>
+          </a:xfrm>
+          <a:prstGeom prst="rect">
+            <a:avLst/>
+          </a:prstGeom>
+          <a:noFill/>
+          <a:ln/>
+        </p:spPr>
+        <p:txBody>
+          <a:bodyPr wrap="square" lIns="0" tIns="0" rIns="0" bIns="0" rtlCol="0" anchor="t"/>
+          <a:lstStyle/>
+          <a:p>
+            <a:pPr algn="l" indent="0" marL="0">
+              <a:lnSpc>
+                <a:spcPts val="2640"/>
+              </a:lnSpc>
+              <a:spcAft>
+                <a:spcPts val="1300"/>
+              </a:spcAft>
+              <a:buNone/>
+            </a:pPr>
+            <a:r>
+              <a:rPr lang="en-US" sz="2200" dirty="0">
+                <a:solidFill>
+                  <a:srgbClr val="111111"/>
+                </a:solidFill>
+                <a:latin typeface="Lato" pitchFamily="34" charset="0"/>
+                <a:ea typeface="Lato" pitchFamily="34" charset="-122"/>
+                <a:cs typeface="Lato" pitchFamily="34" charset="-120"/>
+              </a:rPr>
+              <a:t>It means: The file or environment was not tested on the showcase laptop.</a:t>
+            </a:r>
+            <a:endParaRPr lang="en-US" sz="2200" dirty="0"/>
+          </a:p>
+          <a:p>
+            <a:pPr algn="l" indent="0" marL="0">
+              <a:lnSpc>
+                <a:spcPts val="2640"/>
+              </a:lnSpc>
+              <a:spcAft>
+                <a:spcPts val="1300"/>
+              </a:spcAft>
+              <a:buNone/>
+            </a:pPr>
+            <a:r>
+              <a:rPr lang="en-US" sz="2200" dirty="0">
+                <a:solidFill>
+                  <a:srgbClr val="111111"/>
+                </a:solidFill>
+                <a:latin typeface="Lato" pitchFamily="34" charset="0"/>
+                <a:ea typeface="Lato" pitchFamily="34" charset="-122"/>
+                <a:cs typeface="Lato" pitchFamily="34" charset="-120"/>
+              </a:rPr>
+              <a:t>Fix: Use the PDF and screenshots, explain the workflow, and arrange a short live rerun afterwards.</a:t>
+            </a:r>
+            <a:endParaRPr lang="en-US" sz="2200" dirty="0"/>
+          </a:p>
+        </p:txBody>
+      </p:sp>
+      <p:sp>
+        <p:nvSpPr>
+          <p:cNvPr id="7" name="Shape 4"/>
+          <p:cNvSpPr/>
+          <p:nvPr/>
+        </p:nvSpPr>
+        <p:spPr>
+          <a:xfrm>
+            <a:off x="640080" y="3813048"/>
+            <a:ext cx="10881360" cy="0"/>
+          </a:xfrm>
+          <a:prstGeom prst="line">
+            <a:avLst/>
+          </a:prstGeom>
+          <a:noFill/>
+          <a:ln w="12700">
+            <a:solidFill>
+              <a:srgbClr val="CFCFCF"/>
+            </a:solidFill>
+            <a:prstDash val="solid"/>
+          </a:ln>
+        </p:spPr>
+      </p:sp>
+      <p:pic>
+        <p:nvPicPr>
+          <p:cNvPr id="8" name="Image 1" descr="Error">    </p:cNvPr>
+          <p:cNvPicPr>
+            <a:picLocks noChangeAspect="1"/>
+          </p:cNvPicPr>
+          <p:nvPr/>
+        </p:nvPicPr>
+        <p:blipFill>
+          <a:blip r:embed="rId2"/>
+          <a:stretch>
+            <a:fillRect/>
+          </a:stretch>
+        </p:blipFill>
+        <p:spPr>
+          <a:xfrm>
+            <a:off x="640080" y="4023360"/>
+            <a:ext cx="822960" cy="822960"/>
+          </a:xfrm>
+          <a:prstGeom prst="rect">
+            <a:avLst/>
+          </a:prstGeom>
+        </p:spPr>
+      </p:pic>
+      <p:sp>
+        <p:nvSpPr>
+          <p:cNvPr id="9" name="Shape 5"/>
+          <p:cNvSpPr/>
+          <p:nvPr/>
+        </p:nvSpPr>
+        <p:spPr>
+          <a:xfrm>
+            <a:off x="1645920" y="4160520"/>
+            <a:ext cx="4023360" cy="1645920"/>
+          </a:xfrm>
+          <a:prstGeom prst="roundRect">
+            <a:avLst>
+              <a:gd name="adj" fmla="val 3333"/>
+            </a:avLst>
+          </a:prstGeom>
+          <a:solidFill>
+            <a:srgbClr val="FFFFFF"/>
+          </a:solidFill>
+          <a:ln w="25400">
+            <a:solidFill>
+              <a:srgbClr val="AE2525"/>
+            </a:solidFill>
+            <a:prstDash val="solid"/>
+          </a:ln>
+        </p:spPr>
+      </p:sp>
+      <p:sp>
+        <p:nvSpPr>
+          <p:cNvPr id="10" name="Text 6"/>
+          <p:cNvSpPr txBox="1"/>
+          <p:nvPr/>
+        </p:nvSpPr>
+        <p:spPr>
+          <a:xfrm>
+            <a:off x="1783080" y="4251960"/>
+            <a:ext cx="3749040" cy="1463040"/>
+          </a:xfrm>
+          <a:prstGeom prst="rect">
+            <a:avLst/>
+          </a:prstGeom>
+          <a:noFill/>
+          <a:ln/>
+        </p:spPr>
+        <p:txBody>
+          <a:bodyPr wrap="square" lIns="0" tIns="0" rIns="0" bIns="0" rtlCol="0" anchor="ctr"/>
+          <a:lstStyle/>
+          <a:p>
+            <a:pPr algn="l" indent="0" marL="0">
+              <a:lnSpc>
+                <a:spcPts val="2500"/>
+              </a:lnSpc>
+              <a:buNone/>
+            </a:pPr>
+            <a:r>
+              <a:rPr lang="en-US" sz="2000" dirty="0">
+                <a:solidFill>
+                  <a:srgbClr val="AE2525"/>
+                </a:solidFill>
+                <a:latin typeface="Courier New" pitchFamily="34" charset="0"/>
+                <a:ea typeface="Courier New" pitchFamily="34" charset="-122"/>
+                <a:cs typeface="Courier New" pitchFamily="34" charset="-120"/>
+              </a:rPr>
+              <a:t>A question about the code cannot be answered</a:t>
+            </a:r>
+            <a:endParaRPr lang="en-US" sz="2000" dirty="0"/>
+          </a:p>
+        </p:txBody>
+      </p:sp>
+      <p:sp>
+        <p:nvSpPr>
+          <p:cNvPr id="11" name="Text 7"/>
+          <p:cNvSpPr txBox="1"/>
+          <p:nvPr/>
+        </p:nvSpPr>
+        <p:spPr>
+          <a:xfrm>
+            <a:off x="6035040" y="3995928"/>
+            <a:ext cx="5486400" cy="1965960"/>
+          </a:xfrm>
+          <a:prstGeom prst="rect">
+            <a:avLst/>
+          </a:prstGeom>
+          <a:noFill/>
+          <a:ln/>
+        </p:spPr>
+        <p:txBody>
+          <a:bodyPr wrap="square" lIns="0" tIns="0" rIns="0" bIns="0" rtlCol="0" anchor="t"/>
+          <a:lstStyle/>
+          <a:p>
+            <a:pPr algn="l" indent="0" marL="0">
+              <a:lnSpc>
+                <a:spcPts val="2640"/>
+              </a:lnSpc>
+              <a:spcAft>
+                <a:spcPts val="1300"/>
+              </a:spcAft>
+              <a:buNone/>
+            </a:pPr>
+            <a:r>
+              <a:rPr lang="en-US" sz="2200" dirty="0">
+                <a:solidFill>
+                  <a:srgbClr val="111111"/>
+                </a:solidFill>
+                <a:latin typeface="Lato" pitchFamily="34" charset="0"/>
+                <a:ea typeface="Lato" pitchFamily="34" charset="-122"/>
+                <a:cs typeface="Lato" pitchFamily="34" charset="-120"/>
+              </a:rPr>
+              <a:t>It means: The student has not traced that line since they wrote it.</a:t>
+            </a:r>
+            <a:endParaRPr lang="en-US" sz="2200" dirty="0"/>
+          </a:p>
+          <a:p>
+            <a:pPr algn="l" indent="0" marL="0">
+              <a:lnSpc>
+                <a:spcPts val="2640"/>
+              </a:lnSpc>
+              <a:spcAft>
+                <a:spcPts val="1300"/>
+              </a:spcAft>
+              <a:buNone/>
+            </a:pPr>
+            <a:r>
+              <a:rPr lang="en-US" sz="2200" dirty="0">
+                <a:solidFill>
+                  <a:srgbClr val="111111"/>
+                </a:solidFill>
+                <a:latin typeface="Lato" pitchFamily="34" charset="0"/>
+                <a:ea typeface="Lato" pitchFamily="34" charset="-122"/>
+                <a:cs typeface="Lato" pitchFamily="34" charset="-120"/>
+              </a:rPr>
+              <a:t>Fix: Say what the line is meant to do, then run it on a small input to show it.</a:t>
+            </a:r>
+            <a:endParaRPr lang="en-US" sz="2200" dirty="0"/>
+          </a:p>
+        </p:txBody>
+      </p:sp>
       <p:sp>
         <p:nvSpPr>
           <p:cNvPr id="25" name="Slide Number Placeholder 0"/>
